--- a/Hymn of Heaven_CH.pptx
+++ b/Hymn of Heaven_CH.pptx
@@ -267,7 +267,7 @@
           <a:p>
             <a:fld id="{E759A0DE-F190-5444-87AC-4719D5F20D15}" type="datetimeFigureOut">
               <a:rPr lang="en-US" smtClean="0"/>
-              <a:t>5/31/26</a:t>
+              <a:t>10/28/26</a:t>
             </a:fld>
             <a:endParaRPr lang="en-US"/>
           </a:p>
@@ -465,7 +465,7 @@
           <a:p>
             <a:fld id="{E759A0DE-F190-5444-87AC-4719D5F20D15}" type="datetimeFigureOut">
               <a:rPr lang="en-US" smtClean="0"/>
-              <a:t>5/31/26</a:t>
+              <a:t>10/28/26</a:t>
             </a:fld>
             <a:endParaRPr lang="en-US"/>
           </a:p>
@@ -673,7 +673,7 @@
           <a:p>
             <a:fld id="{E759A0DE-F190-5444-87AC-4719D5F20D15}" type="datetimeFigureOut">
               <a:rPr lang="en-US" smtClean="0"/>
-              <a:t>5/31/26</a:t>
+              <a:t>10/28/26</a:t>
             </a:fld>
             <a:endParaRPr lang="en-US"/>
           </a:p>
@@ -871,7 +871,7 @@
           <a:p>
             <a:fld id="{E759A0DE-F190-5444-87AC-4719D5F20D15}" type="datetimeFigureOut">
               <a:rPr lang="en-US" smtClean="0"/>
-              <a:t>5/31/26</a:t>
+              <a:t>10/28/26</a:t>
             </a:fld>
             <a:endParaRPr lang="en-US"/>
           </a:p>
@@ -1146,7 +1146,7 @@
           <a:p>
             <a:fld id="{E759A0DE-F190-5444-87AC-4719D5F20D15}" type="datetimeFigureOut">
               <a:rPr lang="en-US" smtClean="0"/>
-              <a:t>5/31/26</a:t>
+              <a:t>10/28/26</a:t>
             </a:fld>
             <a:endParaRPr lang="en-US"/>
           </a:p>
@@ -1411,7 +1411,7 @@
           <a:p>
             <a:fld id="{E759A0DE-F190-5444-87AC-4719D5F20D15}" type="datetimeFigureOut">
               <a:rPr lang="en-US" smtClean="0"/>
-              <a:t>5/31/26</a:t>
+              <a:t>10/28/26</a:t>
             </a:fld>
             <a:endParaRPr lang="en-US"/>
           </a:p>
@@ -1823,7 +1823,7 @@
           <a:p>
             <a:fld id="{E759A0DE-F190-5444-87AC-4719D5F20D15}" type="datetimeFigureOut">
               <a:rPr lang="en-US" smtClean="0"/>
-              <a:t>5/31/26</a:t>
+              <a:t>10/28/26</a:t>
             </a:fld>
             <a:endParaRPr lang="en-US"/>
           </a:p>
@@ -1964,7 +1964,7 @@
           <a:p>
             <a:fld id="{E759A0DE-F190-5444-87AC-4719D5F20D15}" type="datetimeFigureOut">
               <a:rPr lang="en-US" smtClean="0"/>
-              <a:t>5/31/26</a:t>
+              <a:t>10/28/26</a:t>
             </a:fld>
             <a:endParaRPr lang="en-US"/>
           </a:p>
@@ -2077,7 +2077,7 @@
           <a:p>
             <a:fld id="{E759A0DE-F190-5444-87AC-4719D5F20D15}" type="datetimeFigureOut">
               <a:rPr lang="en-US" smtClean="0"/>
-              <a:t>5/31/26</a:t>
+              <a:t>10/28/26</a:t>
             </a:fld>
             <a:endParaRPr lang="en-US"/>
           </a:p>
@@ -2388,7 +2388,7 @@
           <a:p>
             <a:fld id="{E759A0DE-F190-5444-87AC-4719D5F20D15}" type="datetimeFigureOut">
               <a:rPr lang="en-US" smtClean="0"/>
-              <a:t>5/31/26</a:t>
+              <a:t>10/28/26</a:t>
             </a:fld>
             <a:endParaRPr lang="en-US"/>
           </a:p>
@@ -2676,7 +2676,7 @@
           <a:p>
             <a:fld id="{E759A0DE-F190-5444-87AC-4719D5F20D15}" type="datetimeFigureOut">
               <a:rPr lang="en-US" smtClean="0"/>
-              <a:t>5/31/26</a:t>
+              <a:t>10/28/26</a:t>
             </a:fld>
             <a:endParaRPr lang="en-US"/>
           </a:p>
@@ -2917,7 +2917,7 @@
           <a:p>
             <a:fld id="{E759A0DE-F190-5444-87AC-4719D5F20D15}" type="datetimeFigureOut">
               <a:rPr lang="en-US" smtClean="0"/>
-              <a:t>5/31/26</a:t>
+              <a:t>10/28/26</a:t>
             </a:fld>
             <a:endParaRPr lang="en-US"/>
           </a:p>
@@ -3789,8 +3789,8 @@
         </p:nvSpPr>
         <p:spPr>
           <a:xfrm>
-            <a:off x="682831" y="497702"/>
-            <a:ext cx="10826338" cy="5862596"/>
+            <a:off x="228600" y="497702"/>
+            <a:ext cx="11671300" cy="5966598"/>
           </a:xfrm>
         </p:spPr>
         <p:txBody>
@@ -3961,6 +3961,46 @@
               <a:latin typeface="Avenir Medium" panose="02000503020000020003" pitchFamily="2" charset="0"/>
               <a:ea typeface="Bodoni Ornaments" pitchFamily="2" charset="0"/>
             </a:endParaRPr>
+          </a:p>
+        </p:txBody>
+      </p:sp>
+      <p:sp>
+        <p:nvSpPr>
+          <p:cNvPr id="2" name="TextBox 1">
+            <a:extLst>
+              <a:ext uri="{FF2B5EF4-FFF2-40B4-BE49-F238E27FC236}">
+                <a16:creationId xmlns:a16="http://schemas.microsoft.com/office/drawing/2014/main" id="{908972D1-9DD2-4BAD-B07A-8B71ABA994B1}"/>
+              </a:ext>
+            </a:extLst>
+          </p:cNvPr>
+          <p:cNvSpPr txBox="1"/>
+          <p:nvPr/>
+        </p:nvSpPr>
+        <p:spPr>
+          <a:xfrm>
+            <a:off x="9308162" y="6006355"/>
+            <a:ext cx="2633926" cy="646331"/>
+          </a:xfrm>
+          <a:prstGeom prst="rect">
+            <a:avLst/>
+          </a:prstGeom>
+          <a:noFill/>
+        </p:spPr>
+        <p:txBody>
+          <a:bodyPr wrap="none" rtlCol="0">
+            <a:spAutoFit/>
+          </a:bodyPr>
+          <a:lstStyle/>
+          <a:p>
+            <a:pPr algn="r"/>
+            <a:r>
+              <a:rPr lang="en-US" sz="3600" b="1" dirty="0">
+                <a:solidFill>
+                  <a:schemeClr val="bg1"/>
+                </a:solidFill>
+              </a:rPr>
+              <a:t>To CHORUS</a:t>
+            </a:r>
           </a:p>
         </p:txBody>
       </p:sp>
@@ -4161,6 +4201,46 @@
           </a:p>
         </p:txBody>
       </p:sp>
+      <p:sp>
+        <p:nvSpPr>
+          <p:cNvPr id="2" name="TextBox 1">
+            <a:extLst>
+              <a:ext uri="{FF2B5EF4-FFF2-40B4-BE49-F238E27FC236}">
+                <a16:creationId xmlns:a16="http://schemas.microsoft.com/office/drawing/2014/main" id="{490070D0-F8B7-8DCD-335C-10A2CA5FD83C}"/>
+              </a:ext>
+            </a:extLst>
+          </p:cNvPr>
+          <p:cNvSpPr txBox="1"/>
+          <p:nvPr/>
+        </p:nvSpPr>
+        <p:spPr>
+          <a:xfrm>
+            <a:off x="9716158" y="6006355"/>
+            <a:ext cx="2225930" cy="646331"/>
+          </a:xfrm>
+          <a:prstGeom prst="rect">
+            <a:avLst/>
+          </a:prstGeom>
+          <a:noFill/>
+        </p:spPr>
+        <p:txBody>
+          <a:bodyPr wrap="none" rtlCol="0">
+            <a:spAutoFit/>
+          </a:bodyPr>
+          <a:lstStyle/>
+          <a:p>
+            <a:pPr algn="r"/>
+            <a:r>
+              <a:rPr lang="en-US" sz="3600" b="1" dirty="0">
+                <a:solidFill>
+                  <a:schemeClr val="bg1"/>
+                </a:solidFill>
+              </a:rPr>
+              <a:t>TO VERSE</a:t>
+            </a:r>
+          </a:p>
+        </p:txBody>
+      </p:sp>
     </p:spTree>
     <p:extLst>
       <p:ext uri="{BB962C8B-B14F-4D97-AF65-F5344CB8AC3E}">
@@ -4378,6 +4458,46 @@
           </a:p>
         </p:txBody>
       </p:sp>
+      <p:sp>
+        <p:nvSpPr>
+          <p:cNvPr id="2" name="TextBox 1">
+            <a:extLst>
+              <a:ext uri="{FF2B5EF4-FFF2-40B4-BE49-F238E27FC236}">
+                <a16:creationId xmlns:a16="http://schemas.microsoft.com/office/drawing/2014/main" id="{8A5C9DD2-43BE-5E61-CEEA-528906B2FC39}"/>
+              </a:ext>
+            </a:extLst>
+          </p:cNvPr>
+          <p:cNvSpPr txBox="1"/>
+          <p:nvPr/>
+        </p:nvSpPr>
+        <p:spPr>
+          <a:xfrm>
+            <a:off x="9206403" y="6006355"/>
+            <a:ext cx="2735685" cy="646331"/>
+          </a:xfrm>
+          <a:prstGeom prst="rect">
+            <a:avLst/>
+          </a:prstGeom>
+          <a:noFill/>
+        </p:spPr>
+        <p:txBody>
+          <a:bodyPr wrap="none" rtlCol="0">
+            <a:spAutoFit/>
+          </a:bodyPr>
+          <a:lstStyle/>
+          <a:p>
+            <a:pPr algn="r"/>
+            <a:r>
+              <a:rPr lang="en-US" sz="3600" b="1" dirty="0">
+                <a:solidFill>
+                  <a:schemeClr val="bg1"/>
+                </a:solidFill>
+              </a:rPr>
+              <a:t>TO CHORUS</a:t>
+            </a:r>
+          </a:p>
+        </p:txBody>
+      </p:sp>
     </p:spTree>
     <p:extLst>
       <p:ext uri="{BB962C8B-B14F-4D97-AF65-F5344CB8AC3E}">
@@ -4575,6 +4695,46 @@
           </a:p>
         </p:txBody>
       </p:sp>
+      <p:sp>
+        <p:nvSpPr>
+          <p:cNvPr id="2" name="TextBox 1">
+            <a:extLst>
+              <a:ext uri="{FF2B5EF4-FFF2-40B4-BE49-F238E27FC236}">
+                <a16:creationId xmlns:a16="http://schemas.microsoft.com/office/drawing/2014/main" id="{0951C2DD-506E-D65A-334F-3F7D79579142}"/>
+              </a:ext>
+            </a:extLst>
+          </p:cNvPr>
+          <p:cNvSpPr txBox="1"/>
+          <p:nvPr/>
+        </p:nvSpPr>
+        <p:spPr>
+          <a:xfrm>
+            <a:off x="9716158" y="6006355"/>
+            <a:ext cx="2225930" cy="646331"/>
+          </a:xfrm>
+          <a:prstGeom prst="rect">
+            <a:avLst/>
+          </a:prstGeom>
+          <a:noFill/>
+        </p:spPr>
+        <p:txBody>
+          <a:bodyPr wrap="none" rtlCol="0">
+            <a:spAutoFit/>
+          </a:bodyPr>
+          <a:lstStyle/>
+          <a:p>
+            <a:pPr algn="r"/>
+            <a:r>
+              <a:rPr lang="en-US" sz="3600" b="1" dirty="0">
+                <a:solidFill>
+                  <a:schemeClr val="bg1"/>
+                </a:solidFill>
+              </a:rPr>
+              <a:t>TO VERSE</a:t>
+            </a:r>
+          </a:p>
+        </p:txBody>
+      </p:sp>
     </p:spTree>
     <p:extLst>
       <p:ext uri="{BB962C8B-B14F-4D97-AF65-F5344CB8AC3E}">
@@ -4772,6 +4932,46 @@
           </a:p>
         </p:txBody>
       </p:sp>
+      <p:sp>
+        <p:nvSpPr>
+          <p:cNvPr id="2" name="TextBox 1">
+            <a:extLst>
+              <a:ext uri="{FF2B5EF4-FFF2-40B4-BE49-F238E27FC236}">
+                <a16:creationId xmlns:a16="http://schemas.microsoft.com/office/drawing/2014/main" id="{ADA09E45-A060-1811-9653-0CE09BE11A00}"/>
+              </a:ext>
+            </a:extLst>
+          </p:cNvPr>
+          <p:cNvSpPr txBox="1"/>
+          <p:nvPr/>
+        </p:nvSpPr>
+        <p:spPr>
+          <a:xfrm>
+            <a:off x="9716158" y="6006355"/>
+            <a:ext cx="2225930" cy="646331"/>
+          </a:xfrm>
+          <a:prstGeom prst="rect">
+            <a:avLst/>
+          </a:prstGeom>
+          <a:noFill/>
+        </p:spPr>
+        <p:txBody>
+          <a:bodyPr wrap="none" rtlCol="0">
+            <a:spAutoFit/>
+          </a:bodyPr>
+          <a:lstStyle/>
+          <a:p>
+            <a:pPr algn="r"/>
+            <a:r>
+              <a:rPr lang="en-US" sz="3600" b="1" dirty="0">
+                <a:solidFill>
+                  <a:schemeClr val="bg1"/>
+                </a:solidFill>
+              </a:rPr>
+              <a:t>TO VERSE</a:t>
+            </a:r>
+          </a:p>
+        </p:txBody>
+      </p:sp>
     </p:spTree>
     <p:extLst>
       <p:ext uri="{BB962C8B-B14F-4D97-AF65-F5344CB8AC3E}">
@@ -5015,6 +5215,46 @@
           </a:p>
         </p:txBody>
       </p:sp>
+      <p:sp>
+        <p:nvSpPr>
+          <p:cNvPr id="2" name="TextBox 1">
+            <a:extLst>
+              <a:ext uri="{FF2B5EF4-FFF2-40B4-BE49-F238E27FC236}">
+                <a16:creationId xmlns:a16="http://schemas.microsoft.com/office/drawing/2014/main" id="{11AEF3E3-8FD9-D62B-3CE1-FA5287092DD2}"/>
+              </a:ext>
+            </a:extLst>
+          </p:cNvPr>
+          <p:cNvSpPr txBox="1"/>
+          <p:nvPr/>
+        </p:nvSpPr>
+        <p:spPr>
+          <a:xfrm>
+            <a:off x="9206403" y="6006355"/>
+            <a:ext cx="2735685" cy="646331"/>
+          </a:xfrm>
+          <a:prstGeom prst="rect">
+            <a:avLst/>
+          </a:prstGeom>
+          <a:noFill/>
+        </p:spPr>
+        <p:txBody>
+          <a:bodyPr wrap="none" rtlCol="0">
+            <a:spAutoFit/>
+          </a:bodyPr>
+          <a:lstStyle/>
+          <a:p>
+            <a:pPr algn="r"/>
+            <a:r>
+              <a:rPr lang="en-US" sz="3600" b="1" dirty="0">
+                <a:solidFill>
+                  <a:schemeClr val="bg1"/>
+                </a:solidFill>
+              </a:rPr>
+              <a:t>TO CHORUS</a:t>
+            </a:r>
+          </a:p>
+        </p:txBody>
+      </p:sp>
     </p:spTree>
     <p:extLst>
       <p:ext uri="{BB962C8B-B14F-4D97-AF65-F5344CB8AC3E}">
@@ -5212,6 +5452,46 @@
           </a:p>
         </p:txBody>
       </p:sp>
+      <p:sp>
+        <p:nvSpPr>
+          <p:cNvPr id="2" name="TextBox 1">
+            <a:extLst>
+              <a:ext uri="{FF2B5EF4-FFF2-40B4-BE49-F238E27FC236}">
+                <a16:creationId xmlns:a16="http://schemas.microsoft.com/office/drawing/2014/main" id="{6D22D9AF-AFD9-56B1-4988-CF76EDE37612}"/>
+              </a:ext>
+            </a:extLst>
+          </p:cNvPr>
+          <p:cNvSpPr txBox="1"/>
+          <p:nvPr/>
+        </p:nvSpPr>
+        <p:spPr>
+          <a:xfrm>
+            <a:off x="9206403" y="6006355"/>
+            <a:ext cx="2735685" cy="646331"/>
+          </a:xfrm>
+          <a:prstGeom prst="rect">
+            <a:avLst/>
+          </a:prstGeom>
+          <a:noFill/>
+        </p:spPr>
+        <p:txBody>
+          <a:bodyPr wrap="none" rtlCol="0">
+            <a:spAutoFit/>
+          </a:bodyPr>
+          <a:lstStyle/>
+          <a:p>
+            <a:pPr algn="r"/>
+            <a:r>
+              <a:rPr lang="en-US" sz="3600" b="1" dirty="0">
+                <a:solidFill>
+                  <a:schemeClr val="bg1"/>
+                </a:solidFill>
+              </a:rPr>
+              <a:t>TO CHORUS</a:t>
+            </a:r>
+          </a:p>
+        </p:txBody>
+      </p:sp>
     </p:spTree>
     <p:extLst>
       <p:ext uri="{BB962C8B-B14F-4D97-AF65-F5344CB8AC3E}">
@@ -5275,7 +5555,7 @@
         <p:spPr>
           <a:xfrm>
             <a:off x="682831" y="497702"/>
-            <a:ext cx="10826338" cy="5862596"/>
+            <a:ext cx="9375569" cy="5862596"/>
           </a:xfrm>
         </p:spPr>
         <p:txBody>
@@ -5475,6 +5755,46 @@
               <a:latin typeface="Avenir Medium" panose="02000503020000020003" pitchFamily="2" charset="0"/>
               <a:ea typeface="Bodoni Ornaments" pitchFamily="2" charset="0"/>
             </a:endParaRPr>
+          </a:p>
+        </p:txBody>
+      </p:sp>
+      <p:sp>
+        <p:nvSpPr>
+          <p:cNvPr id="2" name="TextBox 1">
+            <a:extLst>
+              <a:ext uri="{FF2B5EF4-FFF2-40B4-BE49-F238E27FC236}">
+                <a16:creationId xmlns:a16="http://schemas.microsoft.com/office/drawing/2014/main" id="{4B3C2F6C-06BE-1A16-BBF1-3C4979094C46}"/>
+              </a:ext>
+            </a:extLst>
+          </p:cNvPr>
+          <p:cNvSpPr txBox="1"/>
+          <p:nvPr/>
+        </p:nvSpPr>
+        <p:spPr>
+          <a:xfrm>
+            <a:off x="10832489" y="6006355"/>
+            <a:ext cx="1109599" cy="646331"/>
+          </a:xfrm>
+          <a:prstGeom prst="rect">
+            <a:avLst/>
+          </a:prstGeom>
+          <a:noFill/>
+        </p:spPr>
+        <p:txBody>
+          <a:bodyPr wrap="none" rtlCol="0">
+            <a:spAutoFit/>
+          </a:bodyPr>
+          <a:lstStyle/>
+          <a:p>
+            <a:pPr algn="r"/>
+            <a:r>
+              <a:rPr lang="en-US" sz="3600" b="1" dirty="0">
+                <a:solidFill>
+                  <a:schemeClr val="bg1"/>
+                </a:solidFill>
+              </a:rPr>
+              <a:t>END</a:t>
+            </a:r>
           </a:p>
         </p:txBody>
       </p:sp>
